--- a/public/fun/pack/pptx/talkpro/발표템플릿프리미엄_35_연말결산·회고_오닉스골드.pptx
+++ b/public/fun/pack/pptx/talkpro/발표템플릿프리미엄_35_연말결산·회고_오닉스골드.pptx
@@ -115,12 +115,12 @@
   <p:extLst>
     <p:ext uri="{521415D9-36F7-43E2-AB2F-B90AF26B5E84}">
       <p14:sectionLst xmlns:p14="http://schemas.microsoft.com/office/powerpoint/2010/main">
-        <p14:section name="시작" id="{820DC95E-EF19-467F-972A-EE039B8FD425}">
+        <p14:section name="시작" id="{6C03B7A1-9742-4C82-821B-CADE09F0EEE8}">
           <p14:sldIdLst>
             <p14:sldId id="256"/>
           </p14:sldIdLst>
         </p14:section>
-        <p14:section name="본문" id="{77460076-5846-4DA7-A618-D250B2C363F9}">
+        <p14:section name="본문" id="{56FB966D-C575-4E0B-BD13-7431826EFF67}">
           <p14:sldIdLst>
             <p14:sldId id="257"/>
             <p14:sldId id="258"/>
@@ -131,7 +131,7 @@
             <p14:sldId id="263"/>
           </p14:sldIdLst>
         </p14:section>
-        <p14:section name="마무리" id="{4159EFFE-9C8F-4436-B34A-EB552FCBDA1D}">
+        <p14:section name="마무리" id="{88F3E20E-37A0-42FD-AE9F-5AB04E5FFB54}">
           <p14:sldIdLst>
             <p14:sldId id="264"/>
           </p14:sldIdLst>
@@ -2323,7 +2323,7 @@
             </a:lvl1pPr>
           </a:lstStyle>
           <a:p>
-            <a:fld id="{C9C39E86-F47B-433C-B5A9-A45429BE0BC4}" type="slidenum">
+            <a:fld id="{8FC55FD7-D50C-40AD-8FD8-359C3D10375A}" type="slidenum">
               <a:rPr lang="en-US"/>
               <a:t>‹#›</a:t>
             </a:fld>
@@ -3750,7 +3750,7 @@
             </a:lvl1pPr>
           </a:lstStyle>
           <a:p>
-            <a:fld id="{FEB80C22-685D-4B99-AC3F-FE678EFCD136}" type="slidenum">
+            <a:fld id="{22C52D54-5681-4C4A-969E-DB73C070D827}" type="slidenum">
               <a:rPr lang="en-US"/>
               <a:t>‹#›</a:t>
             </a:fld>
@@ -4757,7 +4757,7 @@
             </a:lvl1pPr>
           </a:lstStyle>
           <a:p>
-            <a:fld id="{A3192900-1CB0-4D43-8F91-14B1A6095D9D}" type="slidenum">
+            <a:fld id="{E4597A63-2E40-46CA-AFCD-1E11CEFA045E}" type="slidenum">
               <a:rPr lang="en-US"/>
               <a:t>‹#›</a:t>
             </a:fld>
@@ -5898,7 +5898,7 @@
           <a:p>
             <a:r>
               <a:rPr lang="ko-KR"/>
-              <a:t>올해 가장 달라진 점은 이것입니다</a:t>
+              <a:t>가장 달라진 점은 이것입니다</a:t>
             </a:r>
           </a:p>
         </p:txBody>
@@ -5926,7 +5926,7 @@
           <a:p>
             <a:r>
               <a:rPr lang="ko-KR"/>
-              <a:t>0000. 00. 00</a:t>
+              <a:t>날짜 입력</a:t>
             </a:r>
           </a:p>
         </p:txBody>
@@ -6011,7 +6011,7 @@
           <a:bodyPr/>
           <a:lstStyle/>
           <a:p>
-            <a:fld id="{62760907-F7DB-44F8-A955-E1856D6A68B9}" type="slidenum">
+            <a:fld id="{6BEA175A-5170-4EA0-A583-32804F2B985F}" type="slidenum">
               <a:rPr lang="en-US"/>
               <a:t>‹#›</a:t>
             </a:fld>
@@ -7121,7 +7121,7 @@
           <a:bodyPr/>
           <a:lstStyle/>
           <a:p>
-            <a:fld id="{BF8C3F4C-1975-4219-9E64-81B54D6EF592}" type="slidenum">
+            <a:fld id="{6DA96802-2318-4507-83B9-079EB410544D}" type="slidenum">
               <a:rPr lang="en-US"/>
               <a:t>‹#›</a:t>
             </a:fld>
@@ -7209,7 +7209,7 @@
           <a:bodyPr/>
           <a:lstStyle/>
           <a:p>
-            <a:fld id="{3DBA6236-A0B2-4DC4-951B-02AA890AE270}" type="slidenum">
+            <a:fld id="{94866C54-E1E4-484D-960E-7272DEEF836F}" type="slidenum">
               <a:rPr lang="en-US"/>
               <a:t>‹#›</a:t>
             </a:fld>
@@ -8113,7 +8113,7 @@
           <a:bodyPr/>
           <a:lstStyle/>
           <a:p>
-            <a:fld id="{92C1FA16-A73F-4D68-A187-281CC754D491}" type="slidenum">
+            <a:fld id="{582AE03D-1FBB-4F6A-BEAE-463F426C6446}" type="slidenum">
               <a:rPr lang="en-US"/>
               <a:t>‹#›</a:t>
             </a:fld>
@@ -8715,7 +8715,7 @@
           <a:bodyPr/>
           <a:lstStyle/>
           <a:p>
-            <a:fld id="{951875C2-90BA-4856-B2C8-AF86A8A46C27}" type="slidenum">
+            <a:fld id="{4410B443-2DBA-437E-A409-B980561E7398}" type="slidenum">
               <a:rPr lang="en-US"/>
               <a:t>‹#›</a:t>
             </a:fld>
@@ -8895,7 +8895,7 @@
           <a:bodyPr/>
           <a:lstStyle/>
           <a:p>
-            <a:fld id="{700E5FEF-E06A-4177-A769-8B507AABDAE0}" type="slidenum">
+            <a:fld id="{DF77F585-D6A5-4710-95EA-8186642CA109}" type="slidenum">
               <a:rPr lang="en-US"/>
               <a:t>‹#›</a:t>
             </a:fld>
@@ -9959,7 +9959,7 @@
           <a:bodyPr/>
           <a:lstStyle/>
           <a:p>
-            <a:fld id="{6919AD65-E58A-480A-B435-3AA9DCDFE59E}" type="slidenum">
+            <a:fld id="{68F1103D-8FE1-458F-ACBD-BB7F50FD7DE4}" type="slidenum">
               <a:rPr lang="en-US"/>
               <a:t>‹#›</a:t>
             </a:fld>
